--- a/additions/presentations/#4.pptx
+++ b/additions/presentations/#4.pptx
@@ -22,6 +22,7 @@
     <p:sldId id="274" r:id="rId16"/>
     <p:sldId id="264" r:id="rId17"/>
     <p:sldId id="265" r:id="rId18"/>
+    <p:sldId id="275" r:id="rId19"/>
   </p:sldIdLst>
   <p:sldSz cx="12192000" cy="6858000"/>
   <p:notesSz cx="6858000" cy="9144000"/>
@@ -4592,14 +4593,32 @@
           </a:bodyPr>
           <a:lstStyle/>
           <a:p>
-            <a:pPr indent="444500" algn="just"/>
+            <a:pPr indent="450850" algn="just">
+              <a:buFont typeface="Arial" panose="020B0604020202020204" pitchFamily="34" charset="0"/>
+              <a:buChar char="•"/>
+            </a:pPr>
             <a:r>
               <a:rPr lang="ru-RU" sz="2400" dirty="0"/>
-              <a:t>Одним из важнейших частных случаев распространения частиц является изотропное распределение внутри конуса (телесный угол).</a:t>
-            </a:r>
-          </a:p>
-          <a:p>
-            <a:pPr indent="444500" algn="just"/>
+              <a:t>Одним из важнейших частных случаев распространения частиц является изотропное </a:t>
+            </a:r>
+            <a:r>
+              <a:rPr lang="ru-RU" sz="2400" b="1" dirty="0">
+                <a:solidFill>
+                  <a:srgbClr val="00B0F0"/>
+                </a:solidFill>
+              </a:rPr>
+              <a:t>распределение внутри конуса</a:t>
+            </a:r>
+            <a:r>
+              <a:rPr lang="ru-RU" sz="2400" dirty="0"/>
+              <a:t> (телесный угол).</a:t>
+            </a:r>
+          </a:p>
+          <a:p>
+            <a:pPr indent="450850" algn="just">
+              <a:buFont typeface="Arial" panose="020B0604020202020204" pitchFamily="34" charset="0"/>
+              <a:buChar char="•"/>
+            </a:pPr>
             <a:r>
               <a:rPr lang="ru-RU" sz="2400" dirty="0"/>
               <a:t>Частицы могут вылетать в любом направлении по периферии конуса</a:t>
@@ -4988,6 +5007,245 @@
     <p:extLst>
       <p:ext uri="{BB962C8B-B14F-4D97-AF65-F5344CB8AC3E}">
         <p14:creationId xmlns:p14="http://schemas.microsoft.com/office/powerpoint/2010/main" val="3121090114"/>
+      </p:ext>
+    </p:extLst>
+  </p:cSld>
+  <p:clrMapOvr>
+    <a:masterClrMapping/>
+  </p:clrMapOvr>
+</p:sld>
+</file>
+
+<file path=ppt/slides/slide18.xml><?xml version="1.0" encoding="utf-8"?>
+<p:sld xmlns:a="http://schemas.openxmlformats.org/drawingml/2006/main" xmlns:r="http://schemas.openxmlformats.org/officeDocument/2006/relationships" xmlns:p="http://schemas.openxmlformats.org/presentationml/2006/main">
+  <p:cSld>
+    <p:spTree>
+      <p:nvGrpSpPr>
+        <p:cNvPr id="1" name="">
+          <a:extLst>
+            <a:ext uri="{FF2B5EF4-FFF2-40B4-BE49-F238E27FC236}">
+              <a16:creationId xmlns:a16="http://schemas.microsoft.com/office/drawing/2014/main" id="{E813F55C-D8F7-5FF2-7141-3A8DCF0384F1}"/>
+            </a:ext>
+          </a:extLst>
+        </p:cNvPr>
+        <p:cNvGrpSpPr/>
+        <p:nvPr/>
+      </p:nvGrpSpPr>
+      <p:grpSpPr>
+        <a:xfrm>
+          <a:off x="0" y="0"/>
+          <a:ext cx="0" cy="0"/>
+          <a:chOff x="0" y="0"/>
+          <a:chExt cx="0" cy="0"/>
+        </a:xfrm>
+      </p:grpSpPr>
+      <p:sp>
+        <p:nvSpPr>
+          <p:cNvPr id="2" name="Заголовок 1">
+            <a:extLst>
+              <a:ext uri="{FF2B5EF4-FFF2-40B4-BE49-F238E27FC236}">
+                <a16:creationId xmlns:a16="http://schemas.microsoft.com/office/drawing/2014/main" id="{2AF3FB57-16E3-D51A-BAE9-4D767EEC0DD0}"/>
+              </a:ext>
+            </a:extLst>
+          </p:cNvPr>
+          <p:cNvSpPr>
+            <a:spLocks noGrp="1"/>
+          </p:cNvSpPr>
+          <p:nvPr>
+            <p:ph type="title"/>
+          </p:nvPr>
+        </p:nvSpPr>
+        <p:spPr/>
+        <p:txBody>
+          <a:bodyPr/>
+          <a:lstStyle/>
+          <a:p>
+            <a:r>
+              <a:rPr lang="ru-RU" dirty="0"/>
+              <a:t>Пример реализации</a:t>
+            </a:r>
+            <a:r>
+              <a:rPr lang="en-US" dirty="0"/>
+              <a:t>.</a:t>
+            </a:r>
+            <a:endParaRPr lang="ru-RU" dirty="0"/>
+          </a:p>
+        </p:txBody>
+      </p:sp>
+      <p:pic>
+        <p:nvPicPr>
+          <p:cNvPr id="9" name="Рисунок 8">
+            <a:extLst>
+              <a:ext uri="{FF2B5EF4-FFF2-40B4-BE49-F238E27FC236}">
+                <a16:creationId xmlns:a16="http://schemas.microsoft.com/office/drawing/2014/main" id="{37510EF1-7FD6-7CFF-D112-F4E739919319}"/>
+              </a:ext>
+            </a:extLst>
+          </p:cNvPr>
+          <p:cNvPicPr>
+            <a:picLocks noChangeAspect="1"/>
+          </p:cNvPicPr>
+          <p:nvPr/>
+        </p:nvPicPr>
+        <p:blipFill>
+          <a:blip r:embed="rId2"/>
+          <a:stretch>
+            <a:fillRect/>
+          </a:stretch>
+        </p:blipFill>
+        <p:spPr>
+          <a:xfrm>
+            <a:off x="1694026" y="1425471"/>
+            <a:ext cx="6238875" cy="4695825"/>
+          </a:xfrm>
+          <a:prstGeom prst="rect">
+            <a:avLst/>
+          </a:prstGeom>
+          <a:ln>
+            <a:solidFill>
+              <a:srgbClr val="C00000"/>
+            </a:solidFill>
+          </a:ln>
+        </p:spPr>
+      </p:pic>
+      <p:sp>
+        <p:nvSpPr>
+          <p:cNvPr id="10" name="Прямоугольник 9">
+            <a:extLst>
+              <a:ext uri="{FF2B5EF4-FFF2-40B4-BE49-F238E27FC236}">
+                <a16:creationId xmlns:a16="http://schemas.microsoft.com/office/drawing/2014/main" id="{B837CC5F-6978-2B2F-5B54-2DA50FB254C6}"/>
+              </a:ext>
+            </a:extLst>
+          </p:cNvPr>
+          <p:cNvSpPr/>
+          <p:nvPr/>
+        </p:nvSpPr>
+        <p:spPr>
+          <a:xfrm>
+            <a:off x="7457704" y="1864426"/>
+            <a:ext cx="3158837" cy="1056904"/>
+          </a:xfrm>
+          <a:prstGeom prst="rect">
+            <a:avLst/>
+          </a:prstGeom>
+          <a:solidFill>
+            <a:schemeClr val="bg1"/>
+          </a:solidFill>
+          <a:ln>
+            <a:solidFill>
+              <a:srgbClr val="C00000"/>
+            </a:solidFill>
+          </a:ln>
+        </p:spPr>
+        <p:style>
+          <a:lnRef idx="2">
+            <a:schemeClr val="accent1">
+              <a:shade val="15000"/>
+            </a:schemeClr>
+          </a:lnRef>
+          <a:fillRef idx="1">
+            <a:schemeClr val="accent1"/>
+          </a:fillRef>
+          <a:effectRef idx="0">
+            <a:schemeClr val="accent1"/>
+          </a:effectRef>
+          <a:fontRef idx="minor">
+            <a:schemeClr val="lt1"/>
+          </a:fontRef>
+        </p:style>
+        <p:txBody>
+          <a:bodyPr rtlCol="0" anchor="ctr"/>
+          <a:lstStyle/>
+          <a:p>
+            <a:pPr algn="ctr"/>
+            <a:r>
+              <a:rPr lang="en-US" dirty="0"/>
+              <a:t>.d</a:t>
+            </a:r>
+            <a:endParaRPr lang="ru-RU" dirty="0"/>
+          </a:p>
+        </p:txBody>
+      </p:sp>
+      <p:sp>
+        <p:nvSpPr>
+          <p:cNvPr id="11" name="TextBox 10">
+            <a:extLst>
+              <a:ext uri="{FF2B5EF4-FFF2-40B4-BE49-F238E27FC236}">
+                <a16:creationId xmlns:a16="http://schemas.microsoft.com/office/drawing/2014/main" id="{7BBE2FEC-31C7-DFE6-973B-1A7F57F097A1}"/>
+              </a:ext>
+            </a:extLst>
+          </p:cNvPr>
+          <p:cNvSpPr txBox="1"/>
+          <p:nvPr/>
+        </p:nvSpPr>
+        <p:spPr>
+          <a:xfrm>
+            <a:off x="7609308" y="2131268"/>
+            <a:ext cx="3007233" cy="523220"/>
+          </a:xfrm>
+          <a:prstGeom prst="rect">
+            <a:avLst/>
+          </a:prstGeom>
+          <a:noFill/>
+        </p:spPr>
+        <p:txBody>
+          <a:bodyPr wrap="none" rtlCol="0">
+            <a:spAutoFit/>
+          </a:bodyPr>
+          <a:lstStyle/>
+          <a:p>
+            <a:r>
+              <a:rPr lang="en-US" sz="2800" dirty="0"/>
+              <a:t>/run/beamOn 100</a:t>
+            </a:r>
+            <a:endParaRPr lang="ru-RU" sz="2800" dirty="0"/>
+          </a:p>
+        </p:txBody>
+      </p:sp>
+      <p:sp>
+        <p:nvSpPr>
+          <p:cNvPr id="12" name="TextBox 11">
+            <a:extLst>
+              <a:ext uri="{FF2B5EF4-FFF2-40B4-BE49-F238E27FC236}">
+                <a16:creationId xmlns:a16="http://schemas.microsoft.com/office/drawing/2014/main" id="{120D4D3E-A918-D780-7099-504115052499}"/>
+              </a:ext>
+            </a:extLst>
+          </p:cNvPr>
+          <p:cNvSpPr txBox="1"/>
+          <p:nvPr/>
+        </p:nvSpPr>
+        <p:spPr>
+          <a:xfrm>
+            <a:off x="8241475" y="3527451"/>
+            <a:ext cx="3788229" cy="1612674"/>
+          </a:xfrm>
+          <a:prstGeom prst="rect">
+            <a:avLst/>
+          </a:prstGeom>
+          <a:noFill/>
+          <a:ln>
+            <a:solidFill>
+              <a:schemeClr val="tx1"/>
+            </a:solidFill>
+          </a:ln>
+        </p:spPr>
+        <p:txBody>
+          <a:bodyPr wrap="square" rtlCol="0">
+            <a:spAutoFit/>
+          </a:bodyPr>
+          <a:lstStyle/>
+          <a:p>
+            <a:pPr algn="ctr"/>
+            <a:r>
+              <a:rPr lang="ru-RU" sz="2400" dirty="0"/>
+              <a:t>Видно, что 100 частиц равномерно распределяются внутри конуса.</a:t>
+            </a:r>
+          </a:p>
+        </p:txBody>
+      </p:sp>
+    </p:spTree>
+    <p:extLst>
+      <p:ext uri="{BB962C8B-B14F-4D97-AF65-F5344CB8AC3E}">
+        <p14:creationId xmlns:p14="http://schemas.microsoft.com/office/powerpoint/2010/main" val="1230151277"/>
       </p:ext>
     </p:extLst>
   </p:cSld>
